--- a/dataset/guides/SYS/guide/IT-SYS-008_개발 서버·DB 장애 대응 가이드.pptx
+++ b/dataset/guides/SYS/guide/IT-SYS-008_개발 서버·DB 장애 대응 가이드.pptx
@@ -3116,7 +3116,7 @@
                           <a:ea typeface="맑은 고딕" pitchFamily="34" charset="-122"/>
                           <a:cs typeface="맑은 고딕" pitchFamily="34" charset="-120"/>
                         </a:rPr>
-                        <a:t>개발 서버 접속 불가, SSH 접속 안 됨, 개발서버 ssh 안 들어가져요, 배포 막힘, 팀 전체 배포 불가, 디스크 100%, 로그 정리, 로그 순환, Git·빌드 서버 연동 실패, 빌드 실패, 인증 토큰 만료, 업데이트 이후, 개발 DB·검색엔진 동기화 실패, 커넥터 버전, 분석 결과 불일치</a:t>
+                        <a:t>개발 서버 접속 불가, SSH 접속 안 됨, 배포 막힘, 팀 전체 배포 불가, 디스크 100%, 로그 정리, 로그 순환, Git·빌드 서버 연동 실패, 빌드 실패, 인증 토큰 만료, 업데이트 이후, 개발 DB·검색엔진 동기화 실패, 커넥터 버전, 분석 결과 불일치</a:t>
                       </a:r>
                       <a:endParaRPr lang="en-US" sz="1050" dirty="0">
                         <a:latin typeface="맑은 고딕" charset="0"/>
